--- a/public/fun/pack/pptx/talkpro/발표템플릿프리미엄_44_모임·동호회소개_샴페인누아르.pptx
+++ b/public/fun/pack/pptx/talkpro/발표템플릿프리미엄_44_모임·동호회소개_샴페인누아르.pptx
@@ -115,12 +115,12 @@
   <p:extLst>
     <p:ext uri="{521415D9-36F7-43E2-AB2F-B90AF26B5E84}">
       <p14:sectionLst xmlns:p14="http://schemas.microsoft.com/office/powerpoint/2010/main">
-        <p14:section name="시작" id="{E32D246E-AB5D-4DEF-858F-3718E397FC24}">
+        <p14:section name="시작" id="{53E5A49C-82FE-46DE-B082-1A9118530594}">
           <p14:sldIdLst>
             <p14:sldId id="256"/>
           </p14:sldIdLst>
         </p14:section>
-        <p14:section name="본문" id="{4E24ADA9-6B08-4A27-BD34-D220B82300BE}">
+        <p14:section name="본문" id="{567B6769-116B-48BC-8C91-C67C7972686F}">
           <p14:sldIdLst>
             <p14:sldId id="257"/>
             <p14:sldId id="258"/>
@@ -131,7 +131,7 @@
             <p14:sldId id="263"/>
           </p14:sldIdLst>
         </p14:section>
-        <p14:section name="마무리" id="{08366943-CBCB-4C8B-87DD-46A51D3BD228}">
+        <p14:section name="마무리" id="{67FB025E-0249-4AF5-9BF9-01E1ACAFCC19}">
           <p14:sldIdLst>
             <p14:sldId id="264"/>
           </p14:sldIdLst>
@@ -1861,7 +1861,7 @@
             </a:lvl1pPr>
           </a:lstStyle>
           <a:p>
-            <a:fld id="{67A388E9-EAE9-4AFB-873B-BCB9BD69D15C}" type="slidenum">
+            <a:fld id="{8DA4669C-0025-47CC-9976-3A44946F1CA2}" type="slidenum">
               <a:rPr lang="en-US"/>
               <a:t>‹#›</a:t>
             </a:fld>
@@ -2521,7 +2521,7 @@
             </a:lvl1pPr>
           </a:lstStyle>
           <a:p>
-            <a:fld id="{39ED4DE3-2FC0-4F09-B1C4-0C043D0A1E07}" type="slidenum">
+            <a:fld id="{176EEC45-C9BB-4BFA-9ACE-9BCC01CE5147}" type="slidenum">
               <a:rPr lang="en-US"/>
               <a:t>‹#›</a:t>
             </a:fld>
@@ -3205,7 +3205,7 @@
             </a:lvl1pPr>
           </a:lstStyle>
           <a:p>
-            <a:fld id="{3AC73071-E6C2-4E03-8010-6ECE8FA4FD2E}" type="slidenum">
+            <a:fld id="{2A19E0F3-5518-4132-9CA7-F5DA4787DD7F}" type="slidenum">
               <a:rPr lang="en-US"/>
               <a:t>‹#›</a:t>
             </a:fld>
@@ -4028,7 +4028,7 @@
           <a:p>
             <a:r>
               <a:rPr lang="ko-KR"/>
-              <a:t>겨울 모임 일정과 장소를 안내합니다</a:t>
+              <a:t>모임 일정과 장소를 안내합니다</a:t>
             </a:r>
           </a:p>
         </p:txBody>
@@ -4056,7 +4056,7 @@
           <a:p>
             <a:r>
               <a:rPr lang="ko-KR"/>
-              <a:t>0000. 00. 00</a:t>
+              <a:t>날짜 입력</a:t>
             </a:r>
           </a:p>
         </p:txBody>
@@ -4141,7 +4141,7 @@
           <a:bodyPr/>
           <a:lstStyle/>
           <a:p>
-            <a:fld id="{8B6F249C-BFB9-4914-99FB-9F7AEDAE728E}" type="slidenum">
+            <a:fld id="{E0B50036-5244-4673-8404-062C9C276BC5}" type="slidenum">
               <a:rPr lang="en-US"/>
               <a:t>‹#›</a:t>
             </a:fld>
@@ -5415,7 +5415,7 @@
           <a:bodyPr/>
           <a:lstStyle/>
           <a:p>
-            <a:fld id="{22BDC8A5-A880-4742-8E79-1514C31093E0}" type="slidenum">
+            <a:fld id="{A7FA9DA6-9C49-4F70-8B9A-26C17418EE5F}" type="slidenum">
               <a:rPr lang="en-US"/>
               <a:t>‹#›</a:t>
             </a:fld>
@@ -5503,7 +5503,7 @@
           <a:bodyPr/>
           <a:lstStyle/>
           <a:p>
-            <a:fld id="{5AEC837B-14E8-4E6F-8160-048755AEDDD6}" type="slidenum">
+            <a:fld id="{F14B7F97-4658-4EFA-92A1-7C572542E5BE}" type="slidenum">
               <a:rPr lang="en-US"/>
               <a:t>‹#›</a:t>
             </a:fld>
@@ -6530,7 +6530,7 @@
           <a:bodyPr/>
           <a:lstStyle/>
           <a:p>
-            <a:fld id="{3B2B267F-DD84-4E32-AF42-4114F172F063}" type="slidenum">
+            <a:fld id="{BA694F6D-496B-43B6-8ADC-284F52D26AA1}" type="slidenum">
               <a:rPr lang="en-US"/>
               <a:t>‹#›</a:t>
             </a:fld>
@@ -7182,7 +7182,7 @@
           <a:bodyPr/>
           <a:lstStyle/>
           <a:p>
-            <a:fld id="{A8AD73BD-7BC5-4AB3-AA7D-DE2946694ED2}" type="slidenum">
+            <a:fld id="{0156D3F0-320F-4313-8123-83CD65E8F939}" type="slidenum">
               <a:rPr lang="en-US"/>
               <a:t>‹#›</a:t>
             </a:fld>
@@ -7362,7 +7362,7 @@
           <a:bodyPr/>
           <a:lstStyle/>
           <a:p>
-            <a:fld id="{9D00A69C-C8D2-4CAA-8EC1-8EBB40541F49}" type="slidenum">
+            <a:fld id="{42E5F911-9EAB-42C1-A4E4-5DB4D697A64D}" type="slidenum">
               <a:rPr lang="en-US"/>
               <a:t>‹#›</a:t>
             </a:fld>
@@ -8426,7 +8426,7 @@
           <a:bodyPr/>
           <a:lstStyle/>
           <a:p>
-            <a:fld id="{D1F7769B-2B3B-4D0A-ACA8-406B7980E437}" type="slidenum">
+            <a:fld id="{A6C488DE-2302-4BC3-AA18-9D1BF6052DE0}" type="slidenum">
               <a:rPr lang="en-US"/>
               <a:t>‹#›</a:t>
             </a:fld>
